--- a/artifacts/speaking-portfolio-expanded/talks/retrieval/retrieval-15min-handout.pptx
+++ b/artifacts/speaking-portfolio-expanded/talks/retrieval/retrieval-15min-handout.pptx
@@ -2942,7 +2942,7 @@
                 <a:ea typeface="Arial"/>
                 <a:cs typeface="Arial"/>
               </a:rPr>
-              <a:t xml:space="preserve">Run `bun artifacts/speaking-portfolio-expanded/packets/retrieval/pooling.ts` after revealing F. Walk through 2/2, 1/2, then 2/2. Explain that the metric measures topical relevance, not sufficiency or permission.</a:t>
+              <a:t xml:space="preserve">Run `bun artifacts/speaking-portfolio-expanded/talks/retrieval/pooling.ts` after revealing F. Walk through 2/2, 1/2, then 2/2. Explain that the metric measures topical relevance, not sufficiency or permission.</a:t>
             </a:r>
             <a:endParaRPr lang="en-US" sz="1200"/>
           </a:p>
